--- a/media/resources/files/EkiOrunduuOnduktar_Koboytuu_SandykBashKatyrma_CXzjIsO.pptx
+++ b/media/resources/files/EkiOrunduuOnduktar_Koboytuu_SandykBashKatyrma_CXzjIsO.pptx
@@ -4398,7 +4398,7 @@
             </a:pPr>
             <a:r>
               <a:rPr lang="ru-RU" dirty="0"/>
-              <a:t>Турдуу пикирлер учун ыраазычылык билдиребиз.</a:t>
+              <a:t>Түрдүү пикирлер үчүн ыраазычылык билдиребиз.</a:t>
             </a:r>
           </a:p>
           <a:p>

--- a/media/resources/files/EkiOrunduuOnduktar_Koboytuu_SandykBashKatyrma_CXzjIsO.pptx
+++ b/media/resources/files/EkiOrunduuOnduktar_Koboytuu_SandykBashKatyrma_CXzjIsO.pptx
@@ -5423,7 +5423,7 @@
           <a:p>
             <a:r>
               <a:rPr lang="en-GB" sz="2400" dirty="0"/>
-              <a:t>0.2 × 0.3 = 0.06</a:t>
+              <a:t>0,2 × 0,3 = 0,06</a:t>
             </a:r>
           </a:p>
         </p:txBody>
@@ -6045,7 +6045,7 @@
           <a:p>
             <a:r>
               <a:rPr lang="en-GB" sz="2400" dirty="0"/>
-              <a:t>0.9 × 0.8 = 0.72</a:t>
+              <a:t>0,9 × 0,8 = 0,72</a:t>
             </a:r>
           </a:p>
         </p:txBody>
@@ -6080,7 +6080,7 @@
           <a:p>
             <a:r>
               <a:rPr lang="en-GB" sz="2400" dirty="0"/>
-              <a:t>0.7 × 0.8 = 0.56</a:t>
+              <a:t>0,7 × 0,8 = 0,56</a:t>
             </a:r>
           </a:p>
         </p:txBody>
@@ -6956,7 +6956,7 @@
           <a:p>
             <a:r>
               <a:rPr lang="en-GB" sz="2400" dirty="0"/>
-              <a:t>6.4 × 0.8 = 5.12</a:t>
+              <a:t>6,4 × 0,8 = 5,12</a:t>
             </a:r>
           </a:p>
         </p:txBody>
@@ -7632,7 +7632,7 @@
           <a:p>
             <a:r>
               <a:rPr lang="en-GB" sz="2400" dirty="0"/>
-              <a:t>6.4 × 0.5 = 3.20</a:t>
+              <a:t>6,4 × 0,5 = 3,20</a:t>
             </a:r>
           </a:p>
         </p:txBody>
@@ -7667,7 +7667,7 @@
           <a:p>
             <a:r>
               <a:rPr lang="en-GB" sz="2400" dirty="0"/>
-              <a:t>1.2 × 0.8 = 0.96</a:t>
+              <a:t>1,2 × 0,8 = 0,96</a:t>
             </a:r>
           </a:p>
         </p:txBody>
@@ -7702,7 +7702,7 @@
           <a:p>
             <a:r>
               <a:rPr lang="en-GB" sz="2400" dirty="0"/>
-              <a:t>4.2 × 0.9 = 3.78</a:t>
+              <a:t>4,2 × 0,9 = 3,78</a:t>
             </a:r>
           </a:p>
         </p:txBody>
@@ -7737,7 +7737,7 @@
           <a:p>
             <a:r>
               <a:rPr lang="en-GB" sz="2400" dirty="0"/>
-              <a:t>3.4 × 0.2 = 0.68</a:t>
+              <a:t>3,4 × 0,2 = 0,68</a:t>
             </a:r>
           </a:p>
         </p:txBody>
@@ -7772,7 +7772,7 @@
           <a:p>
             <a:r>
               <a:rPr lang="en-GB" sz="2400" dirty="0"/>
-              <a:t>2.6 × 0.3 = 0.78</a:t>
+              <a:t>2,6 × 0,3 = 0,78</a:t>
             </a:r>
           </a:p>
         </p:txBody>
@@ -7807,7 +7807,7 @@
           <a:p>
             <a:r>
               <a:rPr lang="en-GB" sz="2400" dirty="0"/>
-              <a:t>9.6 × 0.5 = 4.80</a:t>
+              <a:t>9,6 × 0,5 = 4,80</a:t>
             </a:r>
           </a:p>
         </p:txBody>
@@ -7842,7 +7842,7 @@
           <a:p>
             <a:r>
               <a:rPr lang="en-GB" sz="2400" dirty="0"/>
-              <a:t>1.2 × 0.7 = 0.84</a:t>
+              <a:t>1,2 × 0,7 = 0,84</a:t>
             </a:r>
           </a:p>
         </p:txBody>
